--- a/CostVision-Executive-Presentation.pptx
+++ b/CostVision-Executive-Presentation.pptx
@@ -1153,7 +1153,7 @@
           <a:lstStyle/>
           <a:p>
             <a:r>
-              <a:t>Let me translate all of that into the numbers a manager actually cares about. Speed first: what took two to four weeks now takes minutes. That's the seventy-to-ninety percent time reduction, and it means engineers spend their day on decisions instead of spreadsheets. On accuracy, the models are calibrated to real shop-floor data and now corrected by the self-audit — which is exactly what tightens that plus-or-minus-eight-percent band over time. But the line that pays for the whole thing is negotiation power. When you walk into a supplier meeting with a defensible floor price, a fifteen-to-twenty-five percent reduction is a realistic ask — and the far-right stat makes it concrete: on five hundred million of spend, a three percent improvement is fifteen million pounds. This tool doesn't need to be perfect to pay for itself many times over; it needs to be defensible and fast, and it is both.</a:t>
+              <a:t>Let me translate all of that into the numbers a manager actually cares about. Speed first: what took two to four weeks now takes minutes. That's the seventy-to-ninety percent time reduction, and it means engineers spend their day on decisions instead of spreadsheets. On accuracy, be precise: the engine's arithmetic matches a hand calculation to a hundredth of a percent, but no estimate has yet been compared with a price we actually paid. That comparison is what the Log Actual button builds, part by part, and it is the number to quote once it exists. But the line that pays for the whole thing is negotiation power. When you walk into a supplier meeting with a defensible floor price, a fifteen-to-twenty-five percent reduction is a realistic ask — and the far-right stat makes it concrete: on five hundred million of spend, a three percent improvement is fifteen million pounds. This tool doesn't need to be perfect to pay for itself many times over; it needs to be defensible and fast, and it is both.</a:t>
             </a:r>
           </a:p>
         </p:txBody>
@@ -20746,7 +20746,7 @@
                   <a:srgbClr val="2E8B57"/>
                 </a:solidFill>
               </a:rPr>
-              <a:t>±8%</a:t>
+              <a:t>&lt;0.01%</a:t>
             </a:r>
           </a:p>
         </p:txBody>
@@ -20780,7 +20780,7 @@
                   <a:srgbClr val="3A4356"/>
                 </a:solidFill>
               </a:rPr>
-              <a:t>Typical cost model accuracy</a:t>
+              <a:t>Engine vs hand calc, reference part</a:t>
             </a:r>
           </a:p>
         </p:txBody>
@@ -21449,7 +21449,7 @@
                   <a:srgbClr val="3A4356"/>
                 </a:solidFill>
               </a:rPr>
-              <a:t>Built from the physics of the process and checked against real shop-floor data — not a rule of thumb.</a:t>
+              <a:t>Built from the physics of the process, every rate on record. Accuracy is measured as real prices are logged — not claimed up front.</a:t>
             </a:r>
           </a:p>
         </p:txBody>
@@ -29739,12 +29739,12 @@
           <a:p>
             <a:pPr algn="ctr"/>
             <a:r>
-              <a:rPr sz="2800" b="1" i="0">
+              <a:rPr sz="2200" b="1" i="0">
                 <a:solidFill>
                   <a:srgbClr val="1D6FB8"/>
                 </a:solidFill>
               </a:rPr>
-              <a:t>10×</a:t>
+              <a:t>&lt;0.01%</a:t>
             </a:r>
           </a:p>
         </p:txBody>
@@ -29778,7 +29778,7 @@
                   <a:srgbClr val="3A4356"/>
                 </a:solidFill>
               </a:rPr>
-              <a:t>Faster than manual costing</a:t>
+              <a:t>Engine vs hand calc, reference part</a:t>
             </a:r>
           </a:p>
         </p:txBody>
@@ -29852,12 +29852,12 @@
           <a:p>
             <a:pPr algn="ctr"/>
             <a:r>
-              <a:rPr sz="2800" b="1" i="0">
+              <a:rPr sz="2200" b="1" i="0">
                 <a:solidFill>
                   <a:srgbClr val="2E8B57"/>
                 </a:solidFill>
               </a:rPr>
-              <a:t>±8%</a:t>
+              <a:t>8</a:t>
             </a:r>
           </a:p>
         </p:txBody>
@@ -29891,7 +29891,7 @@
                   <a:srgbClr val="3A4356"/>
                 </a:solidFill>
               </a:rPr>
-              <a:t>Typical model accuracy</a:t>
+              <a:t>Cost buckets, each traced to a rate</a:t>
             </a:r>
           </a:p>
         </p:txBody>
@@ -29965,12 +29965,12 @@
           <a:p>
             <a:pPr algn="ctr"/>
             <a:r>
-              <a:rPr sz="2800" b="1" i="0">
+              <a:rPr sz="2200" b="1" i="0">
                 <a:solidFill>
                   <a:srgbClr val="B7791F"/>
                 </a:solidFill>
               </a:rPr>
-              <a:t>0</a:t>
+              <a:t>6</a:t>
             </a:r>
           </a:p>
         </p:txBody>
@@ -30004,7 +30004,7 @@
                   <a:srgbClr val="3A4356"/>
                 </a:solidFill>
               </a:rPr>
-              <a:t>Manual routing steps required</a:t>
+              <a:t>Real parts pinned in regression</a:t>
             </a:r>
           </a:p>
         </p:txBody>

--- a/CostVision-Executive-Presentation.pptx
+++ b/CostVision-Executive-Presentation.pptx
@@ -5125,7 +5125,7 @@
           </a:solidFill>
           <a:ln w="10160">
             <a:solidFill>
-              <a:srgbClr val="2E8B57"/>
+              <a:srgbClr val="2A7F50"/>
             </a:solidFill>
           </a:ln>
         </p:spPr>
@@ -5177,7 +5177,7 @@
             <a:r>
               <a:rPr sz="800" b="1" i="0">
                 <a:solidFill>
-                  <a:srgbClr val="2E8B57"/>
+                  <a:srgbClr val="2A7F50"/>
                 </a:solidFill>
               </a:rPr>
               <a:t>21 Commodity Models</a:t>
@@ -5362,7 +5362,7 @@
           </a:solidFill>
           <a:ln w="10160">
             <a:solidFill>
-              <a:srgbClr val="B7791F"/>
+              <a:srgbClr val="99651A"/>
             </a:solidFill>
           </a:ln>
         </p:spPr>
@@ -5414,7 +5414,7 @@
             <a:r>
               <a:rPr sz="800" b="1" i="0">
                 <a:solidFill>
-                  <a:srgbClr val="B7791F"/>
+                  <a:srgbClr val="99651A"/>
                 </a:solidFill>
               </a:rPr>
               <a:t>DFM / DFA Layer</a:t>
@@ -5520,7 +5520,7 @@
           </a:solidFill>
           <a:ln w="10160">
             <a:solidFill>
-              <a:srgbClr val="2E8B57"/>
+              <a:srgbClr val="2A7F50"/>
             </a:solidFill>
           </a:ln>
         </p:spPr>
@@ -5572,7 +5572,7 @@
             <a:r>
               <a:rPr sz="750" b="1" i="0">
                 <a:solidFill>
-                  <a:srgbClr val="2E8B57"/>
+                  <a:srgbClr val="2A7F50"/>
                 </a:solidFill>
               </a:rPr>
               <a:t>Assembly BOM Rollup</a:t>
@@ -5678,7 +5678,7 @@
           </a:solidFill>
           <a:ln w="10160">
             <a:solidFill>
-              <a:srgbClr val="B7791F"/>
+              <a:srgbClr val="99651A"/>
             </a:solidFill>
           </a:ln>
         </p:spPr>
@@ -5730,7 +5730,7 @@
             <a:r>
               <a:rPr sz="750" b="1" i="0">
                 <a:solidFill>
-                  <a:srgbClr val="B7791F"/>
+                  <a:srgbClr val="99651A"/>
                 </a:solidFill>
               </a:rPr>
               <a:t>Supplier Quote Comparison</a:t>
@@ -5989,7 +5989,7 @@
             <a:r>
               <a:rPr sz="750" b="1" i="0">
                 <a:solidFill>
-                  <a:srgbClr val="6B7280"/>
+                  <a:srgbClr val="686F7D"/>
                 </a:solidFill>
               </a:rPr>
               <a:t>SLIDE 10 / 19</a:t>
@@ -6246,7 +6246,7 @@
             <a:r>
               <a:rPr sz="750" b="0" i="0">
                 <a:solidFill>
-                  <a:srgbClr val="6B7280"/>
+                  <a:srgbClr val="686F7D"/>
                 </a:solidFill>
               </a:rPr>
               <a:t>CostVision — AI-Powered Should-Cost Intelligence  |  Avinash Bhosale  |  Confidential</a:t>
@@ -6479,7 +6479,7 @@
             <a:avLst/>
           </a:prstGeom>
           <a:solidFill>
-            <a:srgbClr val="2E8B57"/>
+            <a:srgbClr val="2A7F50"/>
           </a:solidFill>
           <a:ln>
             <a:noFill/>
@@ -6644,7 +6644,7 @@
             <a:avLst/>
           </a:prstGeom>
           <a:solidFill>
-            <a:srgbClr val="B7791F"/>
+            <a:srgbClr val="99651A"/>
           </a:solidFill>
           <a:ln>
             <a:noFill/>
@@ -6974,7 +6974,7 @@
             <a:avLst/>
           </a:prstGeom>
           <a:solidFill>
-            <a:srgbClr val="2E8B57"/>
+            <a:srgbClr val="2A7F50"/>
           </a:solidFill>
           <a:ln>
             <a:noFill/>
@@ -7304,7 +7304,7 @@
             <a:avLst/>
           </a:prstGeom>
           <a:solidFill>
-            <a:srgbClr val="B7791F"/>
+            <a:srgbClr val="99651A"/>
           </a:solidFill>
           <a:ln>
             <a:noFill/>
@@ -7634,7 +7634,7 @@
             <a:avLst/>
           </a:prstGeom>
           <a:solidFill>
-            <a:srgbClr val="2E8B57"/>
+            <a:srgbClr val="2A7F50"/>
           </a:solidFill>
           <a:ln>
             <a:noFill/>
@@ -7964,7 +7964,7 @@
             <a:avLst/>
           </a:prstGeom>
           <a:solidFill>
-            <a:srgbClr val="B7791F"/>
+            <a:srgbClr val="99651A"/>
           </a:solidFill>
           <a:ln>
             <a:noFill/>
@@ -8329,7 +8329,7 @@
             <a:r>
               <a:rPr sz="750" b="1" i="0">
                 <a:solidFill>
-                  <a:srgbClr val="6B7280"/>
+                  <a:srgbClr val="686F7D"/>
                 </a:solidFill>
               </a:rPr>
               <a:t>SLIDE 11 / 19</a:t>
@@ -8586,7 +8586,7 @@
             <a:r>
               <a:rPr sz="750" b="0" i="0">
                 <a:solidFill>
-                  <a:srgbClr val="6B7280"/>
+                  <a:srgbClr val="686F7D"/>
                 </a:solidFill>
               </a:rPr>
               <a:t>CostVision — AI-Powered Should-Cost Intelligence  |  Avinash Bhosale  |  Confidential</a:t>
@@ -8821,7 +8821,7 @@
             <a:avLst/>
           </a:prstGeom>
           <a:solidFill>
-            <a:srgbClr val="2E8B57"/>
+            <a:srgbClr val="2A7F50"/>
           </a:solidFill>
           <a:ln>
             <a:noFill/>
@@ -8989,7 +8989,7 @@
             <a:avLst/>
           </a:prstGeom>
           <a:solidFill>
-            <a:srgbClr val="B7791F"/>
+            <a:srgbClr val="99651A"/>
           </a:solidFill>
           <a:ln>
             <a:noFill/>
@@ -9323,7 +9323,7 @@
             <a:avLst/>
           </a:prstGeom>
           <a:solidFill>
-            <a:srgbClr val="2E8B57"/>
+            <a:srgbClr val="2A7F50"/>
           </a:solidFill>
           <a:ln>
             <a:noFill/>
@@ -9525,7 +9525,7 @@
             <a:r>
               <a:rPr sz="750" b="1" i="0">
                 <a:solidFill>
-                  <a:srgbClr val="6B7280"/>
+                  <a:srgbClr val="686F7D"/>
                 </a:solidFill>
               </a:rPr>
               <a:t>SLIDE 12 / 19</a:t>
@@ -9782,7 +9782,7 @@
             <a:r>
               <a:rPr sz="750" b="0" i="0">
                 <a:solidFill>
-                  <a:srgbClr val="6B7280"/>
+                  <a:srgbClr val="686F7D"/>
                 </a:solidFill>
               </a:rPr>
               <a:t>CostVision — AI-Powered Should-Cost Intelligence  |  Avinash Bhosale  |  Confidential</a:t>
@@ -9895,7 +9895,7 @@
             <a:r>
               <a:rPr sz="2000" b="1" i="0">
                 <a:solidFill>
-                  <a:srgbClr val="2E8B57"/>
+                  <a:srgbClr val="2A7F50"/>
                 </a:solidFill>
               </a:rPr>
               <a:t>8.5 / 10</a:t>
@@ -9963,7 +9963,7 @@
             <a:r>
               <a:rPr sz="2000" b="1" i="0">
                 <a:solidFill>
-                  <a:srgbClr val="B7791F"/>
+                  <a:srgbClr val="99651A"/>
                 </a:solidFill>
               </a:rPr>
               <a:t>7.0 / 10</a:t>
@@ -10031,7 +10031,7 @@
             <a:r>
               <a:rPr sz="2000" b="1" i="0">
                 <a:solidFill>
-                  <a:srgbClr val="2E8B57"/>
+                  <a:srgbClr val="2A7F50"/>
                 </a:solidFill>
               </a:rPr>
               <a:t>~19.3%</a:t>
@@ -10065,7 +10065,7 @@
             <a:r>
               <a:rPr sz="750" b="0" i="0">
                 <a:solidFill>
-                  <a:srgbClr val="6B7280"/>
+                  <a:srgbClr val="686F7D"/>
                 </a:solidFill>
               </a:rPr>
               <a:t>Scored out of 10  ·  saving is the top three fixes combined</a:t>
@@ -10301,7 +10301,7 @@
             <a:avLst/>
           </a:prstGeom>
           <a:solidFill>
-            <a:srgbClr val="2E8B57"/>
+            <a:srgbClr val="2A7F50"/>
           </a:solidFill>
           <a:ln>
             <a:noFill/>
@@ -10468,7 +10468,7 @@
             <a:avLst/>
           </a:prstGeom>
           <a:solidFill>
-            <a:srgbClr val="B7791F"/>
+            <a:srgbClr val="99651A"/>
           </a:solidFill>
           <a:ln>
             <a:noFill/>
@@ -10840,7 +10840,7 @@
             <a:r>
               <a:rPr sz="750" b="1" i="0">
                 <a:solidFill>
-                  <a:srgbClr val="6B7280"/>
+                  <a:srgbClr val="686F7D"/>
                 </a:solidFill>
               </a:rPr>
               <a:t>SLIDE 13 / 19</a:t>
@@ -11097,7 +11097,7 @@
             <a:r>
               <a:rPr sz="750" b="0" i="0">
                 <a:solidFill>
-                  <a:srgbClr val="6B7280"/>
+                  <a:srgbClr val="686F7D"/>
                 </a:solidFill>
               </a:rPr>
               <a:t>CostVision — AI-Powered Should-Cost Intelligence  |  Avinash Bhosale  |  Confidential</a:t>
@@ -11374,7 +11374,7 @@
                       <a:r>
                         <a:rPr sz="750" b="1">
                           <a:solidFill>
-                            <a:srgbClr val="2E8B57"/>
+                            <a:srgbClr val="2A7F50"/>
                           </a:solidFill>
                         </a:rPr>
                         <a:t>Industry / Aerospace baseline</a:t>
@@ -11464,7 +11464,7 @@
                       <a:r>
                         <a:rPr sz="750" b="1">
                           <a:solidFill>
-                            <a:srgbClr val="2E8B57"/>
+                            <a:srgbClr val="2A7F50"/>
                           </a:solidFill>
                         </a:rPr>
                         <a:t>Premium, high automation</a:t>
@@ -11554,7 +11554,7 @@
                       <a:r>
                         <a:rPr sz="750" b="1">
                           <a:solidFill>
-                            <a:srgbClr val="2E8B57"/>
+                            <a:srgbClr val="2A7F50"/>
                           </a:solidFill>
                         </a:rPr>
                         <a:t>Low-cost EU option</a:t>
@@ -11644,7 +11644,7 @@
                       <a:r>
                         <a:rPr sz="750" b="1">
                           <a:solidFill>
-                            <a:srgbClr val="2E8B57"/>
+                            <a:srgbClr val="2A7F50"/>
                           </a:solidFill>
                         </a:rPr>
                         <a:t>Ultra-low EU labour</a:t>
@@ -11734,7 +11734,7 @@
                       <a:r>
                         <a:rPr sz="750" b="1">
                           <a:solidFill>
-                            <a:srgbClr val="2E8B57"/>
+                            <a:srgbClr val="2A7F50"/>
                           </a:solidFill>
                         </a:rPr>
                         <a:t>Global volume manufacturing</a:t>
@@ -11824,7 +11824,7 @@
                       <a:r>
                         <a:rPr sz="750" b="1">
                           <a:solidFill>
-                            <a:srgbClr val="2E8B57"/>
+                            <a:srgbClr val="2A7F50"/>
                           </a:solidFill>
                         </a:rPr>
                         <a:t>Engineering &amp; electronics hub</a:t>
@@ -11914,7 +11914,7 @@
                       <a:r>
                         <a:rPr sz="750" b="1">
                           <a:solidFill>
-                            <a:srgbClr val="2E8B57"/>
+                            <a:srgbClr val="2A7F50"/>
                           </a:solidFill>
                         </a:rPr>
                         <a:t>Near-shore for North America</a:t>
@@ -12004,7 +12004,7 @@
                       <a:r>
                         <a:rPr sz="750" b="1">
                           <a:solidFill>
-                            <a:srgbClr val="2E8B57"/>
+                            <a:srgbClr val="2A7F50"/>
                           </a:solidFill>
                         </a:rPr>
                         <a:t>Premium North American rates</a:t>
@@ -12094,7 +12094,7 @@
                       <a:r>
                         <a:rPr sz="750" b="1">
                           <a:solidFill>
-                            <a:srgbClr val="2E8B57"/>
+                            <a:srgbClr val="2A7F50"/>
                           </a:solidFill>
                         </a:rPr>
                         <a:t>Electronics &amp; automotive</a:t>
@@ -12184,7 +12184,7 @@
                       <a:r>
                         <a:rPr sz="750" b="1">
                           <a:solidFill>
-                            <a:srgbClr val="2E8B57"/>
+                            <a:srgbClr val="2A7F50"/>
                           </a:solidFill>
                         </a:rPr>
                         <a:t>Lowest-cost electronics hub</a:t>
@@ -12274,7 +12274,7 @@
                       <a:r>
                         <a:rPr sz="750" b="1">
                           <a:solidFill>
-                            <a:srgbClr val="2E8B57"/>
+                            <a:srgbClr val="2A7F50"/>
                           </a:solidFill>
                         </a:rPr>
                         <a:t>South America manufacturing</a:t>
@@ -12364,7 +12364,7 @@
                       <a:r>
                         <a:rPr sz="750" b="1">
                           <a:solidFill>
-                            <a:srgbClr val="2E8B57"/>
+                            <a:srgbClr val="2A7F50"/>
                           </a:solidFill>
                         </a:rPr>
                         <a:t>Electronics &amp; automotive</a:t>
@@ -12598,7 +12598,7 @@
             <a:avLst/>
           </a:prstGeom>
           <a:solidFill>
-            <a:srgbClr val="2E8B57"/>
+            <a:srgbClr val="2A7F50"/>
           </a:solidFill>
           <a:ln>
             <a:noFill/>
@@ -12910,7 +12910,7 @@
             <a:avLst/>
           </a:prstGeom>
           <a:solidFill>
-            <a:srgbClr val="B7791F"/>
+            <a:srgbClr val="99651A"/>
           </a:solidFill>
           <a:ln>
             <a:noFill/>
@@ -13101,7 +13101,7 @@
             <a:r>
               <a:rPr sz="750" b="1" i="0">
                 <a:solidFill>
-                  <a:srgbClr val="6B7280"/>
+                  <a:srgbClr val="686F7D"/>
                 </a:solidFill>
               </a:rPr>
               <a:t>SLIDE 14 / 19</a:t>
@@ -13358,7 +13358,7 @@
             <a:r>
               <a:rPr sz="750" b="0" i="0">
                 <a:solidFill>
-                  <a:srgbClr val="6B7280"/>
+                  <a:srgbClr val="686F7D"/>
                 </a:solidFill>
               </a:rPr>
               <a:t>CostVision — AI-Powered Should-Cost Intelligence  |  Avinash Bhosale  |  Confidential</a:t>
@@ -14945,7 +14945,7 @@
           </a:solidFill>
           <a:ln w="7620">
             <a:solidFill>
-              <a:srgbClr val="2E8B57"/>
+              <a:srgbClr val="2A7F50"/>
             </a:solidFill>
           </a:ln>
         </p:spPr>
@@ -15100,7 +15100,7 @@
             <a:r>
               <a:rPr sz="750" b="1" i="0">
                 <a:solidFill>
-                  <a:srgbClr val="6B7280"/>
+                  <a:srgbClr val="686F7D"/>
                 </a:solidFill>
               </a:rPr>
               <a:t>SLIDE 15 / 19</a:t>
@@ -15357,7 +15357,7 @@
             <a:r>
               <a:rPr sz="750" b="0" i="0">
                 <a:solidFill>
-                  <a:srgbClr val="6B7280"/>
+                  <a:srgbClr val="686F7D"/>
                 </a:solidFill>
               </a:rPr>
               <a:t>CostVision — AI-Powered Should-Cost Intelligence  |  Avinash Bhosale  |  Confidential</a:t>
@@ -15425,7 +15425,7 @@
             <a:avLst/>
           </a:prstGeom>
           <a:solidFill>
-            <a:srgbClr val="2E8B57"/>
+            <a:srgbClr val="2A7F50"/>
           </a:solidFill>
           <a:ln>
             <a:noFill/>
@@ -15755,7 +15755,7 @@
             <a:avLst/>
           </a:prstGeom>
           <a:solidFill>
-            <a:srgbClr val="B7791F"/>
+            <a:srgbClr val="99651A"/>
           </a:solidFill>
           <a:ln>
             <a:noFill/>
@@ -15875,7 +15875,7 @@
             <a:avLst/>
           </a:prstGeom>
           <a:solidFill>
-            <a:srgbClr val="2E8B57"/>
+            <a:srgbClr val="2A7F50"/>
           </a:solidFill>
           <a:ln>
             <a:noFill/>
@@ -15929,7 +15929,7 @@
             <a:r>
               <a:rPr sz="1000" b="1" i="0">
                 <a:solidFill>
-                  <a:srgbClr val="2E8B57"/>
+                  <a:srgbClr val="2A7F50"/>
                 </a:solidFill>
               </a:rPr>
               <a:t>Proven on five real automotive CAD parts</a:t>
@@ -16161,7 +16161,7 @@
                       <a:r>
                         <a:rPr sz="750" b="1">
                           <a:solidFill>
-                            <a:srgbClr val="2E8B57"/>
+                            <a:srgbClr val="2A7F50"/>
                           </a:solidFill>
                         </a:rPr>
                         <a:t>£24.62 blow-mould</a:t>
@@ -16251,7 +16251,7 @@
                       <a:r>
                         <a:rPr sz="750" b="1">
                           <a:solidFill>
-                            <a:srgbClr val="2E8B57"/>
+                            <a:srgbClr val="2A7F50"/>
                           </a:solidFill>
                         </a:rPr>
                         <a:t>£7.79 injection</a:t>
@@ -16341,7 +16341,7 @@
                       <a:r>
                         <a:rPr sz="750" b="1">
                           <a:solidFill>
-                            <a:srgbClr val="2E8B57"/>
+                            <a:srgbClr val="2A7F50"/>
                           </a:solidFill>
                         </a:rPr>
                         <a:t>£6.40 net-shape</a:t>
@@ -16431,7 +16431,7 @@
                       <a:r>
                         <a:rPr sz="750" b="1">
                           <a:solidFill>
-                            <a:srgbClr val="2E8B57"/>
+                            <a:srgbClr val="2A7F50"/>
                           </a:solidFill>
                         </a:rPr>
                         <a:t>Forged steel 8.1 kg</a:t>
@@ -16521,7 +16521,7 @@
                       <a:r>
                         <a:rPr sz="750" b="1">
                           <a:solidFill>
-                            <a:srgbClr val="2E8B57"/>
+                            <a:srgbClr val="2A7F50"/>
                           </a:solidFill>
                         </a:rPr>
                         <a:t>£1.11 runs clean</a:t>
@@ -16987,7 +16987,7 @@
             <a:r>
               <a:rPr sz="750" b="1" i="0">
                 <a:solidFill>
-                  <a:srgbClr val="6B7280"/>
+                  <a:srgbClr val="686F7D"/>
                 </a:solidFill>
               </a:rPr>
               <a:t>SLIDE 16 / 19</a:t>
@@ -17244,7 +17244,7 @@
             <a:r>
               <a:rPr sz="750" b="0" i="0">
                 <a:solidFill>
-                  <a:srgbClr val="6B7280"/>
+                  <a:srgbClr val="686F7D"/>
                 </a:solidFill>
               </a:rPr>
               <a:t>CostVision — AI-Powered Should-Cost Intelligence  |  Avinash Bhosale  |  Confidential</a:t>
@@ -17488,7 +17488,7 @@
                       <a:r>
                         <a:rPr sz="750" b="1">
                           <a:solidFill>
-                            <a:srgbClr val="2E8B57"/>
+                            <a:srgbClr val="2A7F50"/>
                           </a:solidFill>
                         </a:rPr>
                         <a:t>£ 28.40</a:t>
@@ -17622,7 +17622,7 @@
                       <a:r>
                         <a:rPr sz="750" b="1">
                           <a:solidFill>
-                            <a:srgbClr val="2E8B57"/>
+                            <a:srgbClr val="2A7F50"/>
                           </a:solidFill>
                         </a:rPr>
                         <a:t>£ 18.70</a:t>
@@ -17756,7 +17756,7 @@
                       <a:r>
                         <a:rPr sz="750" b="1">
                           <a:solidFill>
-                            <a:srgbClr val="2E8B57"/>
+                            <a:srgbClr val="2A7F50"/>
                           </a:solidFill>
                         </a:rPr>
                         <a:t>£ 22.10</a:t>
@@ -17890,7 +17890,7 @@
                       <a:r>
                         <a:rPr sz="750" b="1">
                           <a:solidFill>
-                            <a:srgbClr val="2E8B57"/>
+                            <a:srgbClr val="2A7F50"/>
                           </a:solidFill>
                         </a:rPr>
                         <a:t>£  3.85</a:t>
@@ -18024,7 +18024,7 @@
                       <a:r>
                         <a:rPr sz="750" b="1">
                           <a:solidFill>
-                            <a:srgbClr val="2E8B57"/>
+                            <a:srgbClr val="2A7F50"/>
                           </a:solidFill>
                         </a:rPr>
                         <a:t>£  4.10</a:t>
@@ -18158,7 +18158,7 @@
                       <a:r>
                         <a:rPr sz="750" b="1">
                           <a:solidFill>
-                            <a:srgbClr val="2E8B57"/>
+                            <a:srgbClr val="2A7F50"/>
                           </a:solidFill>
                         </a:rPr>
                         <a:t>£  4.18</a:t>
@@ -18292,7 +18292,7 @@
                       <a:r>
                         <a:rPr sz="750" b="1">
                           <a:solidFill>
-                            <a:srgbClr val="2E8B57"/>
+                            <a:srgbClr val="2A7F50"/>
                           </a:solidFill>
                         </a:rPr>
                         <a:t>£ 32.60</a:t>
@@ -18426,7 +18426,7 @@
                       <a:r>
                         <a:rPr sz="750" b="1">
                           <a:solidFill>
-                            <a:srgbClr val="2E8B57"/>
+                            <a:srgbClr val="2A7F50"/>
                           </a:solidFill>
                         </a:rPr>
                         <a:t>£ 11.80</a:t>
@@ -18560,7 +18560,7 @@
                       <a:r>
                         <a:rPr sz="750" b="1">
                           <a:solidFill>
-                            <a:srgbClr val="2E8B57"/>
+                            <a:srgbClr val="2A7F50"/>
                           </a:solidFill>
                         </a:rPr>
                         <a:t>£ 185.00</a:t>
@@ -18694,7 +18694,7 @@
                       <a:r>
                         <a:rPr sz="750" b="1">
                           <a:solidFill>
-                            <a:srgbClr val="2E8B57"/>
+                            <a:srgbClr val="2A7F50"/>
                           </a:solidFill>
                         </a:rPr>
                         <a:t>£  9.20</a:t>
@@ -18827,7 +18827,7 @@
             <a:r>
               <a:rPr sz="750" b="0" i="0">
                 <a:solidFill>
-                  <a:srgbClr val="6B7280"/>
+                  <a:srgbClr val="686F7D"/>
                 </a:solidFill>
               </a:rPr>
               <a:t>All costs in GBP  |  AI insights generated per part  |  DFM/DFA score per part  |  Export to 6-sheet Excel or PDF  |  Supplier quote comparison available for each</a:t>
@@ -18930,7 +18930,7 @@
             <a:r>
               <a:rPr sz="750" b="1" i="0">
                 <a:solidFill>
-                  <a:srgbClr val="6B7280"/>
+                  <a:srgbClr val="686F7D"/>
                 </a:solidFill>
               </a:rPr>
               <a:t>SLIDE 17 / 19</a:t>
@@ -19187,7 +19187,7 @@
             <a:r>
               <a:rPr sz="750" b="0" i="0">
                 <a:solidFill>
-                  <a:srgbClr val="6B7280"/>
+                  <a:srgbClr val="686F7D"/>
                 </a:solidFill>
               </a:rPr>
               <a:t>CostVision — AI-Powered Should-Cost Intelligence  |  Avinash Bhosale  |  Confidential</a:t>
@@ -19255,7 +19255,7 @@
             <a:avLst/>
           </a:prstGeom>
           <a:solidFill>
-            <a:srgbClr val="2E8B57"/>
+            <a:srgbClr val="2A7F50"/>
           </a:solidFill>
           <a:ln>
             <a:noFill/>
@@ -19758,7 +19758,7 @@
             <a:avLst/>
           </a:prstGeom>
           <a:solidFill>
-            <a:srgbClr val="B7791F"/>
+            <a:srgbClr val="99651A"/>
           </a:solidFill>
           <a:ln>
             <a:noFill/>
@@ -19925,7 +19925,7 @@
             <a:avLst/>
           </a:prstGeom>
           <a:solidFill>
-            <a:srgbClr val="2E8B57"/>
+            <a:srgbClr val="2A7F50"/>
           </a:solidFill>
           <a:ln>
             <a:noFill/>
@@ -20294,7 +20294,7 @@
             <a:r>
               <a:rPr sz="750" b="1" i="0">
                 <a:solidFill>
-                  <a:srgbClr val="6B7280"/>
+                  <a:srgbClr val="686F7D"/>
                 </a:solidFill>
               </a:rPr>
               <a:t>SLIDE 18 / 19</a:t>
@@ -20551,7 +20551,7 @@
             <a:r>
               <a:rPr sz="750" b="0" i="0">
                 <a:solidFill>
-                  <a:srgbClr val="6B7280"/>
+                  <a:srgbClr val="686F7D"/>
                 </a:solidFill>
               </a:rPr>
               <a:t>CostVision — AI-Powered Should-Cost Intelligence  |  Avinash Bhosale  |  Confidential</a:t>
@@ -20743,7 +20743,7 @@
             <a:r>
               <a:rPr sz="2800" b="1" i="0">
                 <a:solidFill>
-                  <a:srgbClr val="2E8B57"/>
+                  <a:srgbClr val="2A7F50"/>
                 </a:solidFill>
               </a:rPr>
               <a:t>&lt;0.01%</a:t>
@@ -20856,7 +20856,7 @@
             <a:r>
               <a:rPr sz="2800" b="1" i="0">
                 <a:solidFill>
-                  <a:srgbClr val="B7791F"/>
+                  <a:srgbClr val="99651A"/>
                 </a:solidFill>
               </a:rPr>
               <a:t>15–25%</a:t>
@@ -21082,7 +21082,7 @@
             <a:r>
               <a:rPr sz="2800" b="1" i="0">
                 <a:solidFill>
-                  <a:srgbClr val="2E8B57"/>
+                  <a:srgbClr val="2A7F50"/>
                 </a:solidFill>
               </a:rPr>
               <a:t>£15M</a:t>
@@ -21349,7 +21349,7 @@
             <a:avLst/>
           </a:prstGeom>
           <a:solidFill>
-            <a:srgbClr val="2E8B57"/>
+            <a:srgbClr val="2A7F50"/>
           </a:solidFill>
           <a:ln>
             <a:noFill/>
@@ -21514,7 +21514,7 @@
             <a:avLst/>
           </a:prstGeom>
           <a:solidFill>
-            <a:srgbClr val="B7791F"/>
+            <a:srgbClr val="99651A"/>
           </a:solidFill>
           <a:ln>
             <a:noFill/>
@@ -21844,7 +21844,7 @@
             <a:avLst/>
           </a:prstGeom>
           <a:solidFill>
-            <a:srgbClr val="2E8B57"/>
+            <a:srgbClr val="2A7F50"/>
           </a:solidFill>
           <a:ln>
             <a:noFill/>
@@ -22174,7 +22174,7 @@
             <a:avLst/>
           </a:prstGeom>
           <a:solidFill>
-            <a:srgbClr val="B7791F"/>
+            <a:srgbClr val="99651A"/>
           </a:solidFill>
           <a:ln>
             <a:noFill/>
@@ -22539,7 +22539,7 @@
             <a:r>
               <a:rPr sz="750" b="1" i="0">
                 <a:solidFill>
-                  <a:srgbClr val="6B7280"/>
+                  <a:srgbClr val="686F7D"/>
                 </a:solidFill>
               </a:rPr>
               <a:t>SLIDE 19 / 19</a:t>
@@ -22796,7 +22796,7 @@
             <a:r>
               <a:rPr sz="750" b="0" i="0">
                 <a:solidFill>
-                  <a:srgbClr val="6B7280"/>
+                  <a:srgbClr val="686F7D"/>
                 </a:solidFill>
               </a:rPr>
               <a:t>CostVision — AI-Powered Should-Cost Intelligence  |  Avinash Bhosale  |  Confidential</a:t>
@@ -22864,7 +22864,7 @@
             <a:avLst/>
           </a:prstGeom>
           <a:solidFill>
-            <a:srgbClr val="2E8B57"/>
+            <a:srgbClr val="2A7F50"/>
           </a:solidFill>
           <a:ln>
             <a:noFill/>
@@ -22918,7 +22918,7 @@
             <a:r>
               <a:rPr sz="950" b="1" i="0">
                 <a:solidFill>
-                  <a:srgbClr val="2E8B57"/>
+                  <a:srgbClr val="2A7F50"/>
                 </a:solidFill>
                 <a:latin typeface="Segoe UI Emoji"/>
               </a:rPr>
@@ -22927,7 +22927,7 @@
             <a:r>
               <a:rPr sz="950" b="1" i="0">
                 <a:solidFill>
-                  <a:srgbClr val="2E8B57"/>
+                  <a:srgbClr val="2A7F50"/>
                 </a:solidFill>
               </a:rPr>
               <a:t> Current Capabilities — Live Today</a:t>
@@ -22950,7 +22950,7 @@
             <a:avLst/>
           </a:prstGeom>
           <a:solidFill>
-            <a:srgbClr val="2E8B57"/>
+            <a:srgbClr val="2A7F50"/>
           </a:solidFill>
           <a:ln>
             <a:noFill/>
@@ -23027,7 +23027,7 @@
             <a:avLst/>
           </a:prstGeom>
           <a:solidFill>
-            <a:srgbClr val="2E8B57"/>
+            <a:srgbClr val="2A7F50"/>
           </a:solidFill>
           <a:ln>
             <a:noFill/>
@@ -23104,7 +23104,7 @@
             <a:avLst/>
           </a:prstGeom>
           <a:solidFill>
-            <a:srgbClr val="2E8B57"/>
+            <a:srgbClr val="2A7F50"/>
           </a:solidFill>
           <a:ln>
             <a:noFill/>
@@ -23181,7 +23181,7 @@
             <a:avLst/>
           </a:prstGeom>
           <a:solidFill>
-            <a:srgbClr val="2E8B57"/>
+            <a:srgbClr val="2A7F50"/>
           </a:solidFill>
           <a:ln>
             <a:noFill/>
@@ -23258,7 +23258,7 @@
             <a:avLst/>
           </a:prstGeom>
           <a:solidFill>
-            <a:srgbClr val="2E8B57"/>
+            <a:srgbClr val="2A7F50"/>
           </a:solidFill>
           <a:ln>
             <a:noFill/>
@@ -23335,7 +23335,7 @@
             <a:avLst/>
           </a:prstGeom>
           <a:solidFill>
-            <a:srgbClr val="2E8B57"/>
+            <a:srgbClr val="2A7F50"/>
           </a:solidFill>
           <a:ln>
             <a:noFill/>
@@ -23412,7 +23412,7 @@
             <a:avLst/>
           </a:prstGeom>
           <a:solidFill>
-            <a:srgbClr val="2E8B57"/>
+            <a:srgbClr val="2A7F50"/>
           </a:solidFill>
           <a:ln>
             <a:noFill/>
@@ -23489,7 +23489,7 @@
             <a:avLst/>
           </a:prstGeom>
           <a:solidFill>
-            <a:srgbClr val="2E8B57"/>
+            <a:srgbClr val="2A7F50"/>
           </a:solidFill>
           <a:ln>
             <a:noFill/>
@@ -23566,7 +23566,7 @@
             <a:avLst/>
           </a:prstGeom>
           <a:solidFill>
-            <a:srgbClr val="2E8B57"/>
+            <a:srgbClr val="2A7F50"/>
           </a:solidFill>
           <a:ln>
             <a:noFill/>
@@ -23688,7 +23688,7 @@
             <a:avLst/>
           </a:prstGeom>
           <a:solidFill>
-            <a:srgbClr val="B7791F"/>
+            <a:srgbClr val="99651A"/>
           </a:solidFill>
           <a:ln>
             <a:noFill/>
@@ -23742,7 +23742,7 @@
             <a:r>
               <a:rPr sz="900" b="1" i="0">
                 <a:solidFill>
-                  <a:srgbClr val="B7791F"/>
+                  <a:srgbClr val="99651A"/>
                 </a:solidFill>
               </a:rPr>
               <a:t>Phase 2 — H2 2026</a:t>
@@ -24162,7 +24162,7 @@
             <a:avLst/>
           </a:prstGeom>
           <a:solidFill>
-            <a:srgbClr val="2E8B57"/>
+            <a:srgbClr val="2A7F50"/>
           </a:solidFill>
           <a:ln>
             <a:noFill/>
@@ -24216,7 +24216,7 @@
             <a:r>
               <a:rPr sz="900" b="1" i="0">
                 <a:solidFill>
-                  <a:srgbClr val="2E8B57"/>
+                  <a:srgbClr val="2A7F50"/>
                 </a:solidFill>
                 <a:latin typeface="Segoe UI Emoji"/>
               </a:rPr>
@@ -24225,7 +24225,7 @@
             <a:r>
               <a:rPr sz="900" b="1" i="0">
                 <a:solidFill>
-                  <a:srgbClr val="2E8B57"/>
+                  <a:srgbClr val="2A7F50"/>
                 </a:solidFill>
               </a:rPr>
               <a:t>  Pilot Rollout — Next Steps</a:t>
@@ -24341,7 +24341,7 @@
             <a:r>
               <a:rPr sz="800" b="0" i="1">
                 <a:solidFill>
-                  <a:srgbClr val="6B7280"/>
+                  <a:srgbClr val="686F7D"/>
                 </a:solidFill>
               </a:rPr>
               <a:t>"Every engineer should have instant access to accurate, defensible should-cost intelligence — at concept stage, across every commodity, in every region."  — Avinash Bhosale</a:t>
@@ -24444,7 +24444,7 @@
             <a:r>
               <a:rPr sz="750" b="1" i="0">
                 <a:solidFill>
-                  <a:srgbClr val="6B7280"/>
+                  <a:srgbClr val="686F7D"/>
                 </a:solidFill>
               </a:rPr>
               <a:t>SLIDE 02 / 19</a:t>
@@ -24701,7 +24701,7 @@
             <a:r>
               <a:rPr sz="750" b="0" i="0">
                 <a:solidFill>
-                  <a:srgbClr val="6B7280"/>
+                  <a:srgbClr val="686F7D"/>
                 </a:solidFill>
               </a:rPr>
               <a:t>CostVision — AI-Powered Should-Cost Intelligence  |  Avinash Bhosale  |  Confidential</a:t>
@@ -24925,7 +24925,7 @@
             <a:avLst/>
           </a:prstGeom>
           <a:solidFill>
-            <a:srgbClr val="B7791F"/>
+            <a:srgbClr val="99651A"/>
           </a:solidFill>
           <a:ln>
             <a:noFill/>
@@ -25255,7 +25255,7 @@
             <a:avLst/>
           </a:prstGeom>
           <a:solidFill>
-            <a:srgbClr val="B7791F"/>
+            <a:srgbClr val="99651A"/>
           </a:solidFill>
           <a:ln>
             <a:noFill/>
@@ -25585,7 +25585,7 @@
             <a:avLst/>
           </a:prstGeom>
           <a:solidFill>
-            <a:srgbClr val="B7791F"/>
+            <a:srgbClr val="99651A"/>
           </a:solidFill>
           <a:ln>
             <a:noFill/>
@@ -25761,7 +25761,7 @@
             <a:r>
               <a:rPr sz="3600" b="1" i="0">
                 <a:solidFill>
-                  <a:srgbClr val="B7791F"/>
+                  <a:srgbClr val="99651A"/>
                 </a:solidFill>
               </a:rPr>
               <a:t>80%</a:t>
@@ -25898,7 +25898,7 @@
             <a:r>
               <a:rPr sz="750" b="1" i="0">
                 <a:solidFill>
-                  <a:srgbClr val="6B7280"/>
+                  <a:srgbClr val="686F7D"/>
                 </a:solidFill>
               </a:rPr>
               <a:t>SLIDE 03 / 19</a:t>
@@ -26155,7 +26155,7 @@
             <a:r>
               <a:rPr sz="750" b="0" i="0">
                 <a:solidFill>
-                  <a:srgbClr val="6B7280"/>
+                  <a:srgbClr val="686F7D"/>
                 </a:solidFill>
               </a:rPr>
               <a:t>CostVision — AI-Powered Should-Cost Intelligence  |  Avinash Bhosale  |  Confidential</a:t>
@@ -26553,7 +26553,7 @@
             <a:avLst/>
           </a:prstGeom>
           <a:solidFill>
-            <a:srgbClr val="2E8B57"/>
+            <a:srgbClr val="2A7F50"/>
           </a:solidFill>
           <a:ln>
             <a:noFill/>
@@ -26718,7 +26718,7 @@
             <a:avLst/>
           </a:prstGeom>
           <a:solidFill>
-            <a:srgbClr val="B7791F"/>
+            <a:srgbClr val="99651A"/>
           </a:solidFill>
           <a:ln>
             <a:noFill/>
@@ -27213,7 +27213,7 @@
             <a:avLst/>
           </a:prstGeom>
           <a:solidFill>
-            <a:srgbClr val="2E8B57"/>
+            <a:srgbClr val="2A7F50"/>
           </a:solidFill>
           <a:ln>
             <a:noFill/>
@@ -27378,7 +27378,7 @@
             <a:avLst/>
           </a:prstGeom>
           <a:solidFill>
-            <a:srgbClr val="B7791F"/>
+            <a:srgbClr val="99651A"/>
           </a:solidFill>
           <a:ln>
             <a:noFill/>
@@ -27743,7 +27743,7 @@
             <a:r>
               <a:rPr sz="750" b="1" i="0">
                 <a:solidFill>
-                  <a:srgbClr val="6B7280"/>
+                  <a:srgbClr val="686F7D"/>
                 </a:solidFill>
               </a:rPr>
               <a:t>SLIDE 04 / 19</a:t>
@@ -28000,7 +28000,7 @@
             <a:r>
               <a:rPr sz="750" b="0" i="0">
                 <a:solidFill>
-                  <a:srgbClr val="6B7280"/>
+                  <a:srgbClr val="686F7D"/>
                 </a:solidFill>
               </a:rPr>
               <a:t>CostVision — AI-Powered Should-Cost Intelligence  |  Avinash Bhosale  |  Confidential</a:t>
@@ -29139,7 +29139,7 @@
             <a:r>
               <a:rPr sz="850" b="1" i="0">
                 <a:solidFill>
-                  <a:srgbClr val="2E8B57"/>
+                  <a:srgbClr val="2A7F50"/>
                 </a:solidFill>
               </a:rPr>
               <a:t>Key Benefits</a:t>
@@ -29405,7 +29405,7 @@
             <a:r>
               <a:rPr sz="750" b="1" i="0">
                 <a:solidFill>
-                  <a:srgbClr val="6B7280"/>
+                  <a:srgbClr val="686F7D"/>
                 </a:solidFill>
               </a:rPr>
               <a:t>SLIDE 05 / 19</a:t>
@@ -29662,7 +29662,7 @@
             <a:r>
               <a:rPr sz="750" b="0" i="0">
                 <a:solidFill>
-                  <a:srgbClr val="6B7280"/>
+                  <a:srgbClr val="686F7D"/>
                 </a:solidFill>
               </a:rPr>
               <a:t>CostVision — AI-Powered Should-Cost Intelligence  |  Avinash Bhosale  |  Confidential</a:t>
@@ -29854,7 +29854,7 @@
             <a:r>
               <a:rPr sz="2200" b="1" i="0">
                 <a:solidFill>
-                  <a:srgbClr val="2E8B57"/>
+                  <a:srgbClr val="2A7F50"/>
                 </a:solidFill>
               </a:rPr>
               <a:t>8</a:t>
@@ -29967,7 +29967,7 @@
             <a:r>
               <a:rPr sz="2200" b="1" i="0">
                 <a:solidFill>
-                  <a:srgbClr val="B7791F"/>
+                  <a:srgbClr val="99651A"/>
                 </a:solidFill>
               </a:rPr>
               <a:t>6</a:t>
@@ -30863,7 +30863,7 @@
             <a:r>
               <a:rPr sz="750" b="0" i="0">
                 <a:solidFill>
-                  <a:srgbClr val="6B7280"/>
+                  <a:srgbClr val="686F7D"/>
                 </a:solidFill>
               </a:rPr>
               <a:t>AI Detected Material</a:t>
@@ -30976,7 +30976,7 @@
             <a:r>
               <a:rPr sz="750" b="0" i="0">
                 <a:solidFill>
-                  <a:srgbClr val="6B7280"/>
+                  <a:srgbClr val="686F7D"/>
                 </a:solidFill>
               </a:rPr>
               <a:t>Suggested Process</a:t>
@@ -31010,7 +31010,7 @@
             <a:r>
               <a:rPr sz="850" b="1" i="0">
                 <a:solidFill>
-                  <a:srgbClr val="2E8B57"/>
+                  <a:srgbClr val="2A7F50"/>
                 </a:solidFill>
               </a:rPr>
               <a:t>3-Axis CNC Milling + Drilling</a:t>
@@ -31089,7 +31089,7 @@
             <a:r>
               <a:rPr sz="750" b="0" i="0">
                 <a:solidFill>
-                  <a:srgbClr val="6B7280"/>
+                  <a:srgbClr val="686F7D"/>
                 </a:solidFill>
               </a:rPr>
               <a:t>Envelope (L×W×H)</a:t>
@@ -31202,7 +31202,7 @@
             <a:r>
               <a:rPr sz="750" b="0" i="0">
                 <a:solidFill>
-                  <a:srgbClr val="6B7280"/>
+                  <a:srgbClr val="686F7D"/>
                 </a:solidFill>
               </a:rPr>
               <a:t>Est. Net Weight</a:t>
@@ -31315,7 +31315,7 @@
             <a:r>
               <a:rPr sz="750" b="0" i="0">
                 <a:solidFill>
-                  <a:srgbClr val="6B7280"/>
+                  <a:srgbClr val="686F7D"/>
                 </a:solidFill>
               </a:rPr>
               <a:t>Complexity</a:t>
@@ -31349,7 +31349,7 @@
             <a:r>
               <a:rPr sz="850" b="1" i="0">
                 <a:solidFill>
-                  <a:srgbClr val="B7791F"/>
+                  <a:srgbClr val="99651A"/>
                 </a:solidFill>
               </a:rPr>
               <a:t>Moderate — 3 setups</a:t>
@@ -31428,7 +31428,7 @@
             <a:r>
               <a:rPr sz="750" b="0" i="0">
                 <a:solidFill>
-                  <a:srgbClr val="6B7280"/>
+                  <a:srgbClr val="686F7D"/>
                 </a:solidFill>
               </a:rPr>
               <a:t>DFM Pre-check</a:t>
@@ -31462,7 +31462,7 @@
             <a:r>
               <a:rPr sz="850" b="1" i="0">
                 <a:solidFill>
-                  <a:srgbClr val="B7791F"/>
+                  <a:srgbClr val="99651A"/>
                 </a:solidFill>
               </a:rPr>
               <a:t>1 flag: 3 setups → consolidate</a:t>
@@ -31575,7 +31575,7 @@
             <a:r>
               <a:rPr sz="1400" b="1" i="0">
                 <a:solidFill>
-                  <a:srgbClr val="2E8B57"/>
+                  <a:srgbClr val="2A7F50"/>
                 </a:solidFill>
               </a:rPr>
               <a:t>£ 28.40</a:t>
@@ -31684,7 +31684,7 @@
             <a:avLst/>
           </a:prstGeom>
           <a:solidFill>
-            <a:srgbClr val="2E8B57"/>
+            <a:srgbClr val="2A7F50"/>
           </a:solidFill>
           <a:ln>
             <a:noFill/>
@@ -31727,7 +31727,7 @@
             <a:avLst/>
           </a:prstGeom>
           <a:solidFill>
-            <a:srgbClr val="B7791F"/>
+            <a:srgbClr val="99651A"/>
           </a:solidFill>
           <a:ln>
             <a:noFill/>
@@ -31770,7 +31770,7 @@
             <a:avLst/>
           </a:prstGeom>
           <a:solidFill>
-            <a:srgbClr val="6B7280"/>
+            <a:srgbClr val="686F7D"/>
           </a:solidFill>
           <a:ln>
             <a:noFill/>
@@ -31824,7 +31824,7 @@
             <a:r>
               <a:rPr sz="750" b="0" i="0">
                 <a:solidFill>
-                  <a:srgbClr val="6B7280"/>
+                  <a:srgbClr val="686F7D"/>
                 </a:solidFill>
               </a:rPr>
               <a:t>■ Mat 38%  ■ Proc 32%  ■ Lab 12%  ■ Tool 8%  ■ OH 10%</a:t>
@@ -32014,7 +32014,7 @@
             <a:r>
               <a:rPr sz="800" b="0" i="0">
                 <a:solidFill>
-                  <a:srgbClr val="6B7280"/>
+                  <a:srgbClr val="686F7D"/>
                 </a:solidFill>
               </a:rPr>
               <a:t>Drag-drop or file picker — CAD geometry measured by a full kernel, photos read by vision.</a:t>
@@ -32117,7 +32117,7 @@
             <a:r>
               <a:rPr sz="750" b="1" i="0">
                 <a:solidFill>
-                  <a:srgbClr val="6B7280"/>
+                  <a:srgbClr val="686F7D"/>
                 </a:solidFill>
               </a:rPr>
               <a:t>SLIDE 06 / 19</a:t>
@@ -32374,7 +32374,7 @@
             <a:r>
               <a:rPr sz="750" b="0" i="0">
                 <a:solidFill>
-                  <a:srgbClr val="6B7280"/>
+                  <a:srgbClr val="686F7D"/>
                 </a:solidFill>
               </a:rPr>
               <a:t>CostVision — AI-Powered Should-Cost Intelligence  |  Avinash Bhosale  |  Confidential</a:t>
@@ -32598,7 +32598,7 @@
             <a:avLst/>
           </a:prstGeom>
           <a:solidFill>
-            <a:srgbClr val="2E8B57"/>
+            <a:srgbClr val="2A7F50"/>
           </a:solidFill>
           <a:ln>
             <a:noFill/>
@@ -32910,7 +32910,7 @@
             <a:avLst/>
           </a:prstGeom>
           <a:solidFill>
-            <a:srgbClr val="B7791F"/>
+            <a:srgbClr val="99651A"/>
           </a:solidFill>
           <a:ln>
             <a:noFill/>
@@ -33066,7 +33066,7 @@
             <a:avLst/>
           </a:prstGeom>
           <a:solidFill>
-            <a:srgbClr val="0E8074"/>
+            <a:srgbClr val="0D7D71"/>
           </a:solidFill>
           <a:ln>
             <a:noFill/>
@@ -33222,7 +33222,7 @@
             <a:avLst/>
           </a:prstGeom>
           <a:solidFill>
-            <a:srgbClr val="2E8B57"/>
+            <a:srgbClr val="2A7F50"/>
           </a:solidFill>
           <a:ln>
             <a:noFill/>
@@ -33276,7 +33276,7 @@
             <a:r>
               <a:rPr sz="1000" b="1" i="0">
                 <a:solidFill>
-                  <a:srgbClr val="2E8B57"/>
+                  <a:srgbClr val="2A7F50"/>
                 </a:solidFill>
               </a:rPr>
               <a:t>One viewer, many jobs</a:t>
@@ -33418,7 +33418,7 @@
             <a:r>
               <a:rPr sz="750" b="1" i="0">
                 <a:solidFill>
-                  <a:srgbClr val="6B7280"/>
+                  <a:srgbClr val="686F7D"/>
                 </a:solidFill>
               </a:rPr>
               <a:t>SLIDE 07 / 19</a:t>
@@ -33675,7 +33675,7 @@
             <a:r>
               <a:rPr sz="750" b="0" i="0">
                 <a:solidFill>
-                  <a:srgbClr val="6B7280"/>
+                  <a:srgbClr val="686F7D"/>
                 </a:solidFill>
               </a:rPr>
               <a:t>CostVision — AI-Powered Should-Cost Intelligence  |  Avinash Bhosale  |  Confidential</a:t>
@@ -34359,7 +34359,7 @@
           </a:solidFill>
           <a:ln w="11430">
             <a:solidFill>
-              <a:srgbClr val="2E8B57"/>
+              <a:srgbClr val="2A7F50"/>
             </a:solidFill>
           </a:ln>
         </p:spPr>
@@ -34400,7 +34400,7 @@
             <a:avLst/>
           </a:prstGeom>
           <a:solidFill>
-            <a:srgbClr val="2E8B57"/>
+            <a:srgbClr val="2A7F50"/>
           </a:solidFill>
           <a:ln>
             <a:noFill/>
@@ -34454,7 +34454,7 @@
             <a:r>
               <a:rPr sz="1000" b="1" i="0">
                 <a:solidFill>
-                  <a:srgbClr val="2E8B57"/>
+                  <a:srgbClr val="2A7F50"/>
                 </a:solidFill>
                 <a:latin typeface="Segoe UI Emoji"/>
               </a:rPr>
@@ -34463,7 +34463,7 @@
             <a:r>
               <a:rPr sz="1000" b="1" i="0">
                 <a:solidFill>
-                  <a:srgbClr val="2E8B57"/>
+                  <a:srgbClr val="2A7F50"/>
                 </a:solidFill>
               </a:rPr>
               <a:t>  The golden rule</a:t>
@@ -34600,7 +34600,7 @@
             <a:r>
               <a:rPr sz="750" b="1" i="0">
                 <a:solidFill>
-                  <a:srgbClr val="6B7280"/>
+                  <a:srgbClr val="686F7D"/>
                 </a:solidFill>
               </a:rPr>
               <a:t>SLIDE 08 / 19</a:t>
@@ -34857,7 +34857,7 @@
             <a:r>
               <a:rPr sz="750" b="0" i="0">
                 <a:solidFill>
-                  <a:srgbClr val="6B7280"/>
+                  <a:srgbClr val="686F7D"/>
                 </a:solidFill>
               </a:rPr>
               <a:t>CostVision — AI-Powered Should-Cost Intelligence  |  Avinash Bhosale  |  Confidential</a:t>
@@ -36095,7 +36095,7 @@
             <a:avLst/>
           </a:prstGeom>
           <a:solidFill>
-            <a:srgbClr val="B7791F"/>
+            <a:srgbClr val="99651A"/>
           </a:solidFill>
           <a:ln>
             <a:noFill/>
@@ -36149,7 +36149,7 @@
             <a:r>
               <a:rPr sz="1000" b="1" i="0">
                 <a:solidFill>
-                  <a:srgbClr val="B7791F"/>
+                  <a:srgbClr val="99651A"/>
                 </a:solidFill>
               </a:rPr>
               <a:t>5</a:t>
@@ -36355,7 +36355,7 @@
             <a:avLst/>
           </a:prstGeom>
           <a:solidFill>
-            <a:srgbClr val="2E8B57"/>
+            <a:srgbClr val="2A7F50"/>
           </a:solidFill>
           <a:ln>
             <a:noFill/>
@@ -36409,7 +36409,7 @@
             <a:r>
               <a:rPr sz="1000" b="1" i="0">
                 <a:solidFill>
-                  <a:srgbClr val="2E8B57"/>
+                  <a:srgbClr val="2A7F50"/>
                 </a:solidFill>
               </a:rPr>
               <a:t>6</a:t>
@@ -36615,7 +36615,7 @@
             <a:avLst/>
           </a:prstGeom>
           <a:solidFill>
-            <a:srgbClr val="2E8B57"/>
+            <a:srgbClr val="2A7F50"/>
           </a:solidFill>
           <a:ln>
             <a:noFill/>
@@ -36669,7 +36669,7 @@
             <a:r>
               <a:rPr sz="1000" b="1" i="0">
                 <a:solidFill>
-                  <a:srgbClr val="2E8B57"/>
+                  <a:srgbClr val="2A7F50"/>
                 </a:solidFill>
               </a:rPr>
               <a:t>7</a:t>
@@ -37743,7 +37743,7 @@
             <a:r>
               <a:rPr sz="750" b="1" i="0">
                 <a:solidFill>
-                  <a:srgbClr val="6B7280"/>
+                  <a:srgbClr val="686F7D"/>
                 </a:solidFill>
               </a:rPr>
               <a:t>SLIDE 09 / 19</a:t>
@@ -38000,7 +38000,7 @@
             <a:r>
               <a:rPr sz="750" b="0" i="0">
                 <a:solidFill>
-                  <a:srgbClr val="6B7280"/>
+                  <a:srgbClr val="686F7D"/>
                 </a:solidFill>
               </a:rPr>
               <a:t>CostVision — AI-Powered Should-Cost Intelligence  |  Avinash Bhosale  |  Confidential</a:t>
@@ -38148,7 +38148,7 @@
             <a:r>
               <a:rPr sz="800" b="0" i="0">
                 <a:solidFill>
-                  <a:srgbClr val="6B7280"/>
+                  <a:srgbClr val="686F7D"/>
                 </a:solidFill>
               </a:rPr>
               <a:t>3/4/5-axis, turning, grinding</a:t>
@@ -38296,7 +38296,7 @@
             <a:r>
               <a:rPr sz="800" b="0" i="0">
                 <a:solidFill>
-                  <a:srgbClr val="6B7280"/>
+                  <a:srgbClr val="686F7D"/>
                 </a:solidFill>
               </a:rPr>
               <a:t>HPDC, gravity, investment, sand</a:t>
@@ -38444,7 +38444,7 @@
             <a:r>
               <a:rPr sz="800" b="0" i="0">
                 <a:solidFill>
-                  <a:srgbClr val="6B7280"/>
+                  <a:srgbClr val="686F7D"/>
                 </a:solidFill>
               </a:rPr>
               <a:t>Casting + post-ops + HT</a:t>
@@ -38592,7 +38592,7 @@
             <a:r>
               <a:rPr sz="800" b="0" i="0">
                 <a:solidFill>
-                  <a:srgbClr val="6B7280"/>
+                  <a:srgbClr val="686F7D"/>
                 </a:solidFill>
               </a:rPr>
               <a:t>Hot, warm, cold die forging</a:t>
@@ -38740,7 +38740,7 @@
             <a:r>
               <a:rPr sz="800" b="0" i="0">
                 <a:solidFill>
-                  <a:srgbClr val="6B7280"/>
+                  <a:srgbClr val="686F7D"/>
                 </a:solidFill>
               </a:rPr>
               <a:t>Progressive/transfer die</a:t>
@@ -38888,7 +38888,7 @@
             <a:r>
               <a:rPr sz="800" b="0" i="0">
                 <a:solidFill>
-                  <a:srgbClr val="6B7280"/>
+                  <a:srgbClr val="686F7D"/>
                 </a:solidFill>
               </a:rPr>
               <a:t>Laser · punch · press brake · MIG</a:t>
@@ -39036,7 +39036,7 @@
             <a:r>
               <a:rPr sz="800" b="0" i="0">
                 <a:solidFill>
-                  <a:srgbClr val="6B7280"/>
+                  <a:srgbClr val="686F7D"/>
                 </a:solidFill>
               </a:rPr>
               <a:t>Hob · shape · skive · broach · grind</a:t>
@@ -39184,7 +39184,7 @@
             <a:r>
               <a:rPr sz="800" b="0" i="0">
                 <a:solidFill>
-                  <a:srgbClr val="6B7280"/>
+                  <a:srgbClr val="686F7D"/>
                 </a:solidFill>
               </a:rPr>
               <a:t>Thermoplastics, multi-cavity</a:t>
@@ -39332,7 +39332,7 @@
             <a:r>
               <a:rPr sz="800" b="0" i="0">
                 <a:solidFill>
-                  <a:srgbClr val="6B7280"/>
+                  <a:srgbClr val="686F7D"/>
                 </a:solidFill>
               </a:rPr>
               <a:t>HDPE, PET, extrusion blow</a:t>
@@ -39480,7 +39480,7 @@
             <a:r>
               <a:rPr sz="800" b="0" i="0">
                 <a:solidFill>
-                  <a:srgbClr val="6B7280"/>
+                  <a:srgbClr val="686F7D"/>
                 </a:solidFill>
               </a:rPr>
               <a:t>Profile, pipe, sheet, rod</a:t>
@@ -39628,7 +39628,7 @@
             <a:r>
               <a:rPr sz="800" b="0" i="0">
                 <a:solidFill>
-                  <a:srgbClr val="6B7280"/>
+                  <a:srgbClr val="686F7D"/>
                 </a:solidFill>
               </a:rPr>
               <a:t>Vacuum, pressure, twin-sheet</a:t>
@@ -39776,7 +39776,7 @@
             <a:r>
               <a:rPr sz="800" b="0" i="0">
                 <a:solidFill>
-                  <a:srgbClr val="6B7280"/>
+                  <a:srgbClr val="686F7D"/>
                 </a:solidFill>
               </a:rPr>
               <a:t>Large hollow shapes, LLDPE</a:t>
@@ -39924,7 +39924,7 @@
             <a:r>
               <a:rPr sz="800" b="0" i="0">
                 <a:solidFill>
-                  <a:srgbClr val="6B7280"/>
+                  <a:srgbClr val="686F7D"/>
                 </a:solidFill>
               </a:rPr>
               <a:t>Compression, injection, LSR</a:t>
@@ -40072,7 +40072,7 @@
             <a:r>
               <a:rPr sz="800" b="0" i="0">
                 <a:solidFill>
-                  <a:srgbClr val="6B7280"/>
+                  <a:srgbClr val="686F7D"/>
                 </a:solidFill>
               </a:rPr>
               <a:t>CFRP/GFRP, autoclave, RTM, AFP</a:t>
@@ -40220,7 +40220,7 @@
             <a:r>
               <a:rPr sz="800" b="0" i="0">
                 <a:solidFill>
-                  <a:srgbClr val="6B7280"/>
+                  <a:srgbClr val="686F7D"/>
                 </a:solidFill>
               </a:rPr>
               <a:t>E-coat, powder, wet, anodise</a:t>
@@ -40368,7 +40368,7 @@
             <a:r>
               <a:rPr sz="800" b="0" i="0">
                 <a:solidFill>
-                  <a:srgbClr val="6B7280"/>
+                  <a:srgbClr val="686F7D"/>
                 </a:solidFill>
               </a:rPr>
               <a:t>Spot weld, MIG, hem, bond</a:t>
@@ -40516,7 +40516,7 @@
             <a:r>
               <a:rPr sz="800" b="0" i="0">
                 <a:solidFill>
-                  <a:srgbClr val="6B7280"/>
+                  <a:srgbClr val="686F7D"/>
                 </a:solidFill>
               </a:rPr>
               <a:t>2–16L, HDI, rigid-flex, RF/μwave</a:t>
@@ -40664,7 +40664,7 @@
             <a:r>
               <a:rPr sz="800" b="0" i="0">
                 <a:solidFill>
-                  <a:srgbClr val="6B7280"/>
+                  <a:srgbClr val="686F7D"/>
                 </a:solidFill>
               </a:rPr>
               <a:t>SMT, TH, reflow, conformal coat</a:t>
@@ -40812,7 +40812,7 @@
             <a:r>
               <a:rPr sz="800" b="0" i="0">
                 <a:solidFill>
-                  <a:srgbClr val="6B7280"/>
+                  <a:srgbClr val="686F7D"/>
                 </a:solidFill>
               </a:rPr>
               <a:t>Cut-strip-crimp, test, sub-asm</a:t>
@@ -40839,7 +40839,7 @@
           </a:solidFill>
           <a:ln w="10160">
             <a:solidFill>
-              <a:srgbClr val="2E8B57"/>
+              <a:srgbClr val="2A7F50"/>
             </a:solidFill>
           </a:ln>
         </p:spPr>
@@ -40960,7 +40960,7 @@
             <a:r>
               <a:rPr sz="800" b="0" i="0">
                 <a:solidFill>
-                  <a:srgbClr val="6B7280"/>
+                  <a:srgbClr val="686F7D"/>
                 </a:solidFill>
               </a:rPr>
               <a:t>Multi-part BOM, full cost rollup</a:t>
@@ -40987,7 +40987,7 @@
           </a:solidFill>
           <a:ln w="10160">
             <a:solidFill>
-              <a:srgbClr val="2E8B57"/>
+              <a:srgbClr val="2A7F50"/>
             </a:solidFill>
           </a:ln>
         </p:spPr>
@@ -41108,7 +41108,7 @@
             <a:r>
               <a:rPr sz="800" b="0" i="0">
                 <a:solidFill>
-                  <a:srgbClr val="6B7280"/>
+                  <a:srgbClr val="686F7D"/>
                 </a:solidFill>
               </a:rPr>
               <a:t>Natural language → any commodity</a:t>

--- a/CostVision-Executive-Presentation.pptx
+++ b/CostVision-Executive-Presentation.pptx
@@ -15903,7 +15903,7 @@
                             <a:srgbClr val="3A4356"/>
                           </a:solidFill>
                         </a:rPr>
-                        <a:t>Reference bracket, £23.27</a:t>
+                        <a:t>Reference bracket, £24.34</a:t>
                       </a:r>
                     </a:p>
                   </a:txBody>

--- a/CostVision-Executive-Presentation.pptx
+++ b/CostVision-Executive-Presentation.pptx
@@ -523,7 +523,7 @@
           <a:lstStyle/>
           <a:p>
             <a:r>
-              <a:t>Thanks for making the time. CostVision answers one question: what should this part cost to make? Not what the supplier quotes, but what the material, the machine time, the labour and the tooling say it should cost. I want to say two things up front, because they shape everything else. First, the AI is switched off in the JLR build. JLR has no AI approval yet, so the tool runs on measurement, rules and arithmetic. Second, even when AI is on, it never sets a price. Every pound is a sum you can trace back to a rate in the library. Over the next slides I'll show you what it covers, which is nineteen manufacturing processes across twenty regions, how the CAD path works, and, just as important, what we have proven and what we haven't proven yet. I'd rather you leave with an accurate picture than an exciting one.</a:t>
+              <a:t>Thanks for making the time. CostVision answers one question: what should this part cost to make? Not what the supplier quotes, but what the material, the machine time, the labour and the tooling say it should cost. I want to say two things up front, because they shape everything else. First, the AI is waiting for an API key in the JLR build. None has been added yet, so the tool runs on measurement, rules and arithmetic. Second, even when AI is on, it never sets a price. Every pound is a sum you can trace back to a rate in the library. Over the next slides I'll show you what it covers, which is nineteen manufacturing processes across twenty regions, how the CAD path works, and, just as important, what we have proven and what we haven't proven yet. I'd rather you leave with an accurate picture than an exciting one.</a:t>
             </a:r>
           </a:p>
         </p:txBody>
@@ -733,7 +733,7 @@
           <a:lstStyle/>
           <a:p>
             <a:r>
-              <a:t>The design-for-manufacture and assembly layer runs after the cost is settled. It reads the result and advises. It never changes the price, and that separation is deliberate. It scores the part out of ten for making it and for assembling it, lists what it found, grades each issue, and ranks the actions, each with its own saving estimate. I'd treat those estimates as prompts for a conversation, not promises. The engineering team told me the first version was too generic. It read the cost and guessed backwards. They were right. So there's now a second layer that reads the 3D model itself, for castings, forgings, mouldings, machined parts and pressings. It points at the actual faces that cause the problem, and every rule names its source. There's also an optional AI commentary on top, but that's part of the AI mode, so it's switched off at JLR.</a:t>
+              <a:t>The design-for-manufacture and assembly layer runs after the cost is settled. It reads the result and advises. It never changes the price, and that separation is deliberate. It scores the part out of ten for making it and for assembling it, lists what it found, grades each issue, and ranks the actions, each with its own saving estimate. I'd treat those estimates as prompts for a conversation, not promises. The engineering team told me the first version was too generic. It read the cost and guessed backwards. They were right. So there's now a second layer that reads the 3D model itself, for castings, forgings, mouldings, machined parts and pressings. It points at the actual faces that cause the problem, and every rule names its source. There's also an optional AI commentary on top, but that's part of the AI mode, so it's switched needs an API key.</a:t>
             </a:r>
           </a:p>
         </p:txBody>
@@ -873,7 +873,7 @@
           <a:lstStyle/>
           <a:p>
             <a:r>
-              <a:t>This slide separates what works today from what's waiting. On the left is everything that runs at JLR now, with AI switched off and no internet. CAD to cost on rules. The self-audit on every result. Learning from actuals: you log a real quote or purchase-order price, and after three for a commodity the uncertainty band is corrected by real data. And a monitor that compares logged prices with the should-cost and flags where a supplier sits above it. On the right are the AI features. They're built and they're in the product, but they're switched off: describing a part in words, PCB photo to bill of materials, the assistant and the agent. If JLR approves AI, a setting turns them on. The line at the bottom is the one that doesn't change either way. AI never sets a price.</a:t>
+              <a:t>This slide separates what works today from what's waiting. On the left is everything that runs at JLR now, without an API key and no internet. CAD to cost on rules. The self-audit on every result. Learning from actuals: you log a real quote or purchase-order price, and after three for a commodity the uncertainty band is corrected by real data. And a monitor that compares logged prices with the should-cost and flags where a supplier sits above it. On the right are the AI features. They're built and they're in the product, but they're switched waiting for a key: describing a part in words, PCB photo to parts list, the assistant and the agent. If JLR approves AI, a setting turns them on. The line at the bottom is the one that doesn't change either way. AI never sets a price.</a:t>
             </a:r>
           </a:p>
         </p:txBody>
@@ -1223,7 +1223,7 @@
           <a:lstStyle/>
           <a:p>
             <a:r>
-              <a:t>So where does that leave us? The left column is live today, not a wish list. It runs on a laptop, with AI switched off, and it's backed by tests. On the right is where it could go next. First, connecting to the systems we already use, like Teamcenter and SAP, and a cost-target view for programme teams. Then calibrating from live ERP actuals and drafting the RFQ from the should-cost. The last phase includes AI features, and those would only happen if AI is approved. But I don't want the roadmap to distract from the ask, which is small. A four-to-six-week pilot on two or three commodities with one programme team, on real parts, with real quotes and PO prices. We log every actual, so accuracy is measured rather than claimed. That's what I'd like to agree today. Thank you. I'm happy to take questions.</a:t>
+              <a:t>So where does that leave us? The left column is live today, not a wish list. It runs on a laptop, without an API key, and it's backed by tests. On the right is where it could go next. First, connecting to the systems we already use, like Teamcenter and SAP, and a cost-target view for programme teams. Then calibrating from live ERP actuals and drafting the RFQ from the should-cost. The last phase includes AI features, and those would only happen if AI is approved. But I don't want the roadmap to distract from the ask, which is small. A four-to-six-week pilot on two or three commodities with one programme team, on real parts, with real quotes and PO prices. We log every actual, so accuracy is measured rather than claimed. That's what I'd like to agree today. Thank you. I'm happy to take questions.</a:t>
             </a:r>
           </a:p>
         </p:txBody>
@@ -1433,7 +1433,7 @@
           <a:lstStyle/>
           <a:p>
             <a:r>
-              <a:t>I want to be clear about AI, because it's usually the first question. The product has an optional AI mode. When it's on, it can read a plain-English description, a drawing or a PCB photo and suggest the inputs: material, process route, features. That's all it does. It never sets a price. The same rules engine does the sum either way, and anything the AI suggests is checked against the measured geometry. At JLR that mode is switched off, because there's no AI approval yet. The code is still there, turned off by a setting, so if approval comes it can be switched on without a rebuild. With it off, the screens that need AI are hidden. If you do reach one, the tool says so plainly instead of asking for a key. The right-hand side shows what that looks like: you're pointed to the CAD upload or the form, and the costing carries on as normal.</a:t>
+              <a:t>I want to be clear about AI, because it's usually the first question. The product has an optional AI mode. When it's on, it can read a plain-English description, a drawing or the chips on a board photo and suggest the inputs: material, process route, parts list. That's all it does. It never sets a price. The same rules engine does the sum either way, and anything the AI suggests is checked against the measured geometry. At JLR that mode waits for an API key; none has been added yet. The code is still there, turned off by a setting, so if approval comes it can be switched on without a rebuild. Until a key is added, the screens that need AI are hidden. If you do reach one, the tool says so plainly instead of asking for a key. The right-hand side shows what that looks like: you're pointed to the CAD upload or the form, and the costing carries on as normal.</a:t>
             </a:r>
           </a:p>
         </p:txBody>
@@ -1713,7 +1713,7 @@
           <a:lstStyle/>
           <a:p>
             <a:r>
-              <a:t>This slide shows the flow from end to end. At JLR there are two ways in: upload a CAD file, or fill in the form. The third door, describing the part in words, needs AI, so it's switched off. Whichever way you come in, it's the same eight steps. Pick the process, give it the part, let it measure, answer its questions, and it calculates the eight buckets. Then it audits its own result and puts a P10 to P90 band around it, gives you design-for-manufacture advice, and exports. Step four is the one I'd point at. That's where the tool stops and asks rather than guessing. It's a small thing, but it's why I trust the output more than I would a fully automatic answer. And nothing in the chain is a black box.</a:t>
+              <a:t>This slide shows the flow from end to end. At JLR there are two ways in: upload a CAD file, or fill in the form. The third door, describing the part in words, needs AI, so it waits for a key. Whichever way you come in, it's the same eight steps. Pick the process, give it the part, let it measure, answer its questions, and it calculates the eight buckets. Then it audits its own result and puts a P10 to P90 band around it, gives you design-for-manufacture advice, and exports. Step four is the one I'd point at. That's where the tool stops and asks rather than guessing. It's a small thing, but it's why I trust the output more than I would a fully automatic answer. And nothing in the chain is a black box.</a:t>
             </a:r>
           </a:p>
         </p:txBody>
@@ -5338,7 +5338,7 @@
                   <a:srgbClr val="6B3FA0"/>
                 </a:solidFill>
               </a:rPr>
-              <a:t>AI Switched Off at JLR</a:t>
+              <a:t>AI Needs an API Key</a:t>
             </a:r>
           </a:p>
         </p:txBody>
@@ -13094,7 +13094,7 @@
                   <a:srgbClr val="3A4356"/>
                 </a:solidFill>
               </a:rPr>
-              <a:t>Left: what runs at JLR now, with AI switched off. Right: the optional AI features — built, but turned off.</a:t>
+              <a:t>Left: what runs at JLR now, without an API key. Right: the optional AI features — built, waiting for a key.</a:t>
             </a:r>
           </a:p>
         </p:txBody>
@@ -14073,7 +14073,7 @@
                   <a:srgbClr val="6B3FA0"/>
                 </a:solidFill>
               </a:rPr>
-              <a:t>Optional AI Mode — Off at JLR</a:t>
+              <a:t>Optional AI Mode — Needs an API Key</a:t>
             </a:r>
           </a:p>
         </p:txBody>
@@ -14107,7 +14107,7 @@
                   <a:srgbClr val="3A4356"/>
                 </a:solidFill>
               </a:rPr>
-              <a:t>Needs AI approval. Turned on by a setting, with no rebuild.</a:t>
+              <a:t>Turned on by adding a key, with no rebuild. The model reads; the tool prices.</a:t>
             </a:r>
           </a:p>
         </p:txBody>
@@ -14419,7 +14419,7 @@
                   <a:srgbClr val="3A4356"/>
                 </a:solidFill>
               </a:rPr>
-              <a:t>Reads a board photo into a bill of materials, then costs it with the rules.</a:t>
+              <a:t>Reads the chips and lists the parts; the tool prices every line from its catalogue and tables, then costs the board.</a:t>
             </a:r>
           </a:p>
         </p:txBody>
@@ -26666,7 +26666,7 @@
                   <a:srgbClr val="1D6FB8"/>
                 </a:solidFill>
               </a:rPr>
-              <a:t>OPTIONAL AI MODE · SWITCHED OFF AT JLR</a:t>
+              <a:t>OPTIONAL AI MODE · NEEDS AN API KEY</a:t>
             </a:r>
           </a:p>
         </p:txBody>
@@ -26701,7 +26701,7 @@
                 </a:solidFill>
                 <a:latin typeface="Cambria"/>
               </a:rPr>
-              <a:t>AI Mode — Built In, Switched Off, Never Sets a Price</a:t>
+              <a:t>AI Mode — Built In, Needs a Key, Never Sets a Price</a:t>
             </a:r>
           </a:p>
         </p:txBody>
@@ -26735,7 +26735,7 @@
                   <a:srgbClr val="3A4356"/>
                 </a:solidFill>
               </a:rPr>
-              <a:t>The AI code is in the product but turned off. If AI is ever approved, a setting turns it on — no rebuild.</a:t>
+              <a:t>The AI code is in the product. Adding an API key turns it on — no rebuild.</a:t>
             </a:r>
           </a:p>
         </p:txBody>
@@ -26968,7 +26968,7 @@
                   <a:srgbClr val="16325C"/>
                 </a:solidFill>
               </a:rPr>
-              <a:t>1. What it would do (if switched on)</a:t>
+              <a:t>1. What it does (with a key)</a:t>
             </a:r>
           </a:p>
         </p:txBody>
@@ -27002,7 +27002,7 @@
                   <a:srgbClr val="3A4356"/>
                 </a:solidFill>
               </a:rPr>
-              <a:t>Read a plain-English description, a drawing or a PCB photo, and suggest the inputs: material, process route, features.</a:t>
+              <a:t>Reads a plain-English description, a drawing, or the chips on a board photo, and suggests the inputs: material, process route, parts list.</a:t>
             </a:r>
           </a:p>
         </p:txBody>
@@ -27470,7 +27470,7 @@
                   <a:srgbClr val="3A4356"/>
                 </a:solidFill>
               </a:rPr>
-              <a:t>Screens that need AI are hidden. If you reach one, the tool says "AI is switched off in this installation".</a:t>
+              <a:t>Screens that need AI are hidden until a key is added. Every costing path works without them.</a:t>
             </a:r>
           </a:p>
         </p:txBody>
@@ -27592,7 +27592,7 @@
                   <a:srgbClr val="1D6FB8"/>
                 </a:solidFill>
               </a:rPr>
-              <a:t>●  CostVision — JLR build, AI switched off</a:t>
+              <a:t>●  CostVision — JLR build, no API key yet</a:t>
             </a:r>
           </a:p>
         </p:txBody>
@@ -27750,7 +27750,7 @@
                   <a:srgbClr val="16325C"/>
                 </a:solidFill>
               </a:rPr>
-              <a:t>CostVision: AI is switched off in this installation.
+              <a:t>CostVision: AI needs an API key in this installation.
 Costing, CAD geometry and the learning loop work without it.
 • Upload the STEP file, or
 • Fill in the machining form</a:t>
@@ -33820,7 +33820,7 @@
                   <a:srgbClr val="3A4356"/>
                 </a:solidFill>
               </a:rPr>
-              <a:t>Way in A: CAD upload (STEP / IGES / STL)   |   Way in B: Form entry   |   Way in C: Describe the part in words — AI mode, switched off at JLR</a:t>
+              <a:t>Way in A: CAD upload (STEP / IGES / STL)   |   Way in B: Form entry   |   Way in C: Describe the part in words — AI mode, needs an API key</a:t>
             </a:r>
           </a:p>
         </p:txBody>
